--- a/vdom-upate/vdom-update.pptx
+++ b/vdom-upate/vdom-update.pptx
@@ -726,6 +726,18 @@
           <a:bodyPr/>
           <a:lstStyle/>
           <a:p>
+            <a:r>
+              <a:rPr lang="en-US" sz="1200" b="0" i="0" kern="1200" dirty="0">
+                <a:solidFill>
+                  <a:schemeClr val="tx1"/>
+                </a:solidFill>
+                <a:effectLst/>
+                <a:latin typeface="+mn-lt"/>
+                <a:ea typeface="+mn-ea"/>
+                <a:cs typeface="+mn-cs"/>
+              </a:rPr>
+              <a:t>https://play.vuejs.org/#eNqVVMtu00AU/ZWpWThRY7tpuwDjRtCqi7KACigrbxx7nLidzFgzYycosgRsyh8gWCKxQkiwqOT+jT+FOzN5OH0Jsog995w799zjOzO3nue5WxbY8q1AxDzLJRJYFvkgpAhlk5xxiY7GGUlQytkE2a6nVyrFblHmiOMUVQuSARUcMyokmogROlCMjp3RvJC+3V2DYsymKYmWjDQiAgMceEYOCIGFxJOcRBJrWYERVDpZehBay/zQGgRGnCHpSghYE5ZgAkRQEVrIM+iQAxv+zKKQklH0LCZZfNHaEiRttbbXUj3KpHpCts5SOwReS5/Vs6SA1tJs5J4LRsHZuaoSWjGb5BnB/FUuM2g9tHykEYVFhLDpCx2TvMC9ZTwe4/jijvi5mKlYaJ1yLDAvcWitMBnxEZYGPn7zEs/gfQWCGwUB9gPgaywYKZRGQzssaAKyWzyt9kR/+oyO3orjmcRULJtSQhWz0vzQgnE4eqD1tdw9d1/nhbQCF1eDdsdstsduoUr9GD3EKeP4LE/gY/QYNS9JizKNZDxeLzdH9ta42t2ny2jMCioX8R0VJliisg+RHVh4Xt/VxcAPdDqOBAbnINrUP5r6sqm/NPXv5vpDU39r6qum/t7UX1EMNg6j+AI19cfm+nNT/4Kopl7BEsV6yjHBEwyFm/qTJlyCEGieqlihuwvpZtudThcdDBb+Ku2MYJewUcfuu5tMH9nbpi+3jEiBVVc6ZxXZ3oZQBccxpNq4jsZ6qEPx9F1EeoiRBJ73Fdx1dZZvL4k9ZDsDWJl02Nfs7Xm7/2jUT837o334D38Wc3C/NXvm6+FEeXLDkqoLn/LhGynJSjNTQr4nGK6QIeMJ5j7azWcIqmQJGsJuxt/FT3U04lAqcWJGGJAfpWn6JN7fYOVRksBM+ai/k88283UJh0dJVggfPVawpcUpNNhynMXMnp2gMuLZkGDkOFrv6nq8fTvqM2ko472B2QAO61y/VVXgQVSXX5PgEChG2b8JBx74AgU378fqLyLPQss=</a:t>
+            </a:r>
             <a:endParaRPr lang="en-US" dirty="0"/>
           </a:p>
         </p:txBody>
@@ -5072,26 +5084,6 @@
 </file>
 
 <file path=customXml/item1.xml><?xml version="1.0" encoding="utf-8"?>
-<p:properties xmlns:p="http://schemas.microsoft.com/office/2006/metadata/properties" xmlns:xsi="http://www.w3.org/2001/XMLSchema-instance" xmlns:pc="http://schemas.microsoft.com/office/infopath/2007/PartnerControls">
-  <documentManagement>
-    <_ip_UnifiedCompliancePolicyUIAction xmlns="http://schemas.microsoft.com/sharepoint/v3" xsi:nil="true"/>
-    <Image xmlns="71af3243-3dd4-4a8d-8c0d-dd76da1f02a5">
-      <Url xsi:nil="true"/>
-      <Description xsi:nil="true"/>
-    </Image>
-    <Status xmlns="71af3243-3dd4-4a8d-8c0d-dd76da1f02a5">Not started</Status>
-    <Background xmlns="71af3243-3dd4-4a8d-8c0d-dd76da1f02a5">false</Background>
-    <_ip_UnifiedCompliancePolicyProperties xmlns="http://schemas.microsoft.com/sharepoint/v3" xsi:nil="true"/>
-    <ImageTagsTaxHTField xmlns="71af3243-3dd4-4a8d-8c0d-dd76da1f02a5">
-      <Terms xmlns="http://schemas.microsoft.com/office/infopath/2007/PartnerControls"/>
-    </ImageTagsTaxHTField>
-    <TaxCatchAll xmlns="230e9df3-be65-4c73-a93b-d1236ebd677e" xsi:nil="true"/>
-    <MediaServiceKeyPoints xmlns="71af3243-3dd4-4a8d-8c0d-dd76da1f02a5" xsi:nil="true"/>
-  </documentManagement>
-</p:properties>
-</file>
-
-<file path=customXml/item2.xml><?xml version="1.0" encoding="utf-8"?>
 <ct:contentTypeSchema xmlns:ct="http://schemas.microsoft.com/office/2006/metadata/contentType" xmlns:ma="http://schemas.microsoft.com/office/2006/metadata/properties/metaAttributes" ct:_="" ma:_="" ma:contentTypeName="Document" ma:contentTypeID="0x01010079F111ED35F8CC479449609E8A0923A6" ma:contentTypeVersion="27" ma:contentTypeDescription="Create a new document." ma:contentTypeScope="" ma:versionID="c6f9a84f66a9c8b9a21755b9ffafb945">
   <xsd:schema xmlns:xsd="http://www.w3.org/2001/XMLSchema" xmlns:xs="http://www.w3.org/2001/XMLSchema" xmlns:p="http://schemas.microsoft.com/office/2006/metadata/properties" xmlns:ns1="http://schemas.microsoft.com/sharepoint/v3" xmlns:ns2="71af3243-3dd4-4a8d-8c0d-dd76da1f02a5" xmlns:ns3="16c05727-aa75-4e4a-9b5f-8a80a1165891" xmlns:ns4="230e9df3-be65-4c73-a93b-d1236ebd677e" targetNamespace="http://schemas.microsoft.com/office/2006/metadata/properties" ma:root="true" ma:fieldsID="27df39e3e7036dff54f89ddd5805ce72" ns1:_="" ns2:_="" ns3:_="" ns4:_="">
     <xsd:import namespace="http://schemas.microsoft.com/sharepoint/v3"/>
@@ -5397,6 +5389,26 @@
 </ct:contentTypeSchema>
 </file>
 
+<file path=customXml/item2.xml><?xml version="1.0" encoding="utf-8"?>
+<p:properties xmlns:p="http://schemas.microsoft.com/office/2006/metadata/properties" xmlns:xsi="http://www.w3.org/2001/XMLSchema-instance" xmlns:pc="http://schemas.microsoft.com/office/infopath/2007/PartnerControls">
+  <documentManagement>
+    <_ip_UnifiedCompliancePolicyUIAction xmlns="http://schemas.microsoft.com/sharepoint/v3" xsi:nil="true"/>
+    <Image xmlns="71af3243-3dd4-4a8d-8c0d-dd76da1f02a5">
+      <Url xsi:nil="true"/>
+      <Description xsi:nil="true"/>
+    </Image>
+    <Status xmlns="71af3243-3dd4-4a8d-8c0d-dd76da1f02a5">Not started</Status>
+    <Background xmlns="71af3243-3dd4-4a8d-8c0d-dd76da1f02a5">false</Background>
+    <_ip_UnifiedCompliancePolicyProperties xmlns="http://schemas.microsoft.com/sharepoint/v3" xsi:nil="true"/>
+    <ImageTagsTaxHTField xmlns="71af3243-3dd4-4a8d-8c0d-dd76da1f02a5">
+      <Terms xmlns="http://schemas.microsoft.com/office/infopath/2007/PartnerControls"/>
+    </ImageTagsTaxHTField>
+    <TaxCatchAll xmlns="230e9df3-be65-4c73-a93b-d1236ebd677e" xsi:nil="true"/>
+    <MediaServiceKeyPoints xmlns="71af3243-3dd4-4a8d-8c0d-dd76da1f02a5" xsi:nil="true"/>
+  </documentManagement>
+</p:properties>
+</file>
+
 <file path=customXml/item3.xml><?xml version="1.0" encoding="utf-8"?>
 <?mso-contentType ?>
 <FormTemplates xmlns="http://schemas.microsoft.com/sharepoint/v3/contenttype/forms">
@@ -5407,18 +5419,6 @@
 </file>
 
 <file path=customXml/itemProps1.xml><?xml version="1.0" encoding="utf-8"?>
-<ds:datastoreItem xmlns:ds="http://schemas.openxmlformats.org/officeDocument/2006/customXml" ds:itemID="{5A3EE4EA-81C0-48D0-BEBD-A2EFD6B38B42}">
-  <ds:schemaRefs>
-    <ds:schemaRef ds:uri="http://schemas.microsoft.com/office/2006/metadata/properties"/>
-    <ds:schemaRef ds:uri="http://schemas.microsoft.com/office/infopath/2007/PartnerControls"/>
-    <ds:schemaRef ds:uri="http://schemas.microsoft.com/sharepoint/v3"/>
-    <ds:schemaRef ds:uri="71af3243-3dd4-4a8d-8c0d-dd76da1f02a5"/>
-    <ds:schemaRef ds:uri="230e9df3-be65-4c73-a93b-d1236ebd677e"/>
-  </ds:schemaRefs>
-</ds:datastoreItem>
-</file>
-
-<file path=customXml/itemProps2.xml><?xml version="1.0" encoding="utf-8"?>
 <ds:datastoreItem xmlns:ds="http://schemas.openxmlformats.org/officeDocument/2006/customXml" ds:itemID="{B2FC9C26-AD58-4393-99DE-F67958CF6A29}">
   <ds:schemaRefs>
     <ds:schemaRef ds:uri="http://schemas.microsoft.com/office/2006/metadata/contentType"/>
@@ -5439,6 +5439,18 @@
 </ds:datastoreItem>
 </file>
 
+<file path=customXml/itemProps2.xml><?xml version="1.0" encoding="utf-8"?>
+<ds:datastoreItem xmlns:ds="http://schemas.openxmlformats.org/officeDocument/2006/customXml" ds:itemID="{5A3EE4EA-81C0-48D0-BEBD-A2EFD6B38B42}">
+  <ds:schemaRefs>
+    <ds:schemaRef ds:uri="http://schemas.microsoft.com/office/2006/metadata/properties"/>
+    <ds:schemaRef ds:uri="http://schemas.microsoft.com/office/infopath/2007/PartnerControls"/>
+    <ds:schemaRef ds:uri="http://schemas.microsoft.com/sharepoint/v3"/>
+    <ds:schemaRef ds:uri="71af3243-3dd4-4a8d-8c0d-dd76da1f02a5"/>
+    <ds:schemaRef ds:uri="230e9df3-be65-4c73-a93b-d1236ebd677e"/>
+  </ds:schemaRefs>
+</ds:datastoreItem>
+</file>
+
 <file path=customXml/itemProps3.xml><?xml version="1.0" encoding="utf-8"?>
 <ds:datastoreItem xmlns:ds="http://schemas.openxmlformats.org/officeDocument/2006/customXml" ds:itemID="{5563EE24-83AF-4B4D-B45B-11D1ECD4364A}">
   <ds:schemaRefs>
